--- a/presentation.pptx
+++ b/presentation.pptx
@@ -119,13 +119,13 @@
   <p:extLst>
     <p:ext uri="{521415D9-36F7-43E2-AB2F-B90AF26B5E84}">
       <p14:sectionLst xmlns:p14="http://schemas.microsoft.com/office/powerpoint/2010/main">
-        <p14:section name="Introduction" id="{f1edbd73-83db-5687-5870-f940a62808eb}">
+        <p14:section name="Introduction" id="{b358647a-90cf-b7d3-fb61-b1b5da8c0118}">
           <p14:sldIdLst>
             <p14:sldId id="256"/>
             <p14:sldId id="257"/>
           </p14:sldIdLst>
         </p14:section>
-        <p14:section name="Part 1" id="{0b1ebb02-5120-367d-ce2c-95ce3acb643e}">
+        <p14:section name="Part 1" id="{df0ac25a-3a49-edc2-abdf-fac24a05af23}">
           <p14:sldIdLst>
             <p14:sldId id="258"/>
             <p14:sldId id="259"/>
@@ -134,7 +134,7 @@
             <p14:sldId id="262"/>
           </p14:sldIdLst>
         </p14:section>
-        <p14:section name="Part 2" id="{aecfd2f9-7e82-d757-43c4-7dd63511e32f}">
+        <p14:section name="Part 2" id="{6d403b89-67b1-078a-5bd4-0ad0b0b008d4}">
           <p14:sldIdLst>
             <p14:sldId id="263"/>
             <p14:sldId id="264"/>
@@ -142,7 +142,7 @@
             <p14:sldId id="266"/>
           </p14:sldIdLst>
         </p14:section>
-        <p14:section name="Wrap-up" id="{2cddc199-8957-dc03-7dde-02190a0a1192}">
+        <p14:section name="Wrap-up" id="{ce2b6c4a-5dcd-a9d1-3602-21580af9cf22}">
           <p14:sldIdLst>
             <p14:sldId id="267"/>
             <p14:sldId id="268"/>
@@ -1905,7 +1905,7 @@
           <a:p>
             <a:r>
               <a:rPr lang="en-US" dirty="0"/>
-              <a:t>Greedy colouring never collides; only the visiting order changes how many slots it needs. DSATUR adapts as it goes and is usually better, more so on bigger networks. largest_first still wins sometimes, so the tool runs both. Numbers are from 500 random layouts per size in a 2 km square.</a:t>
+              <a:t>Greedy colouring never collides; only the visiting order changes how many slots it needs. Both are written by hand in graph_engine.py and checked against networkx. DSATUR adapts as it goes and is usually better, more so on bigger networks. largest_first still wins sometimes, so the tool runs both. Numbers are from 500 random layouts per size in a 2 km square.</a:t>
             </a:r>
             <a:endParaRPr lang="en-US" dirty="0"/>
           </a:p>
@@ -2169,7 +2169,7 @@
           <a:p>
             <a:r>
               <a:rPr lang="en-US" dirty="0"/>
-              <a:t>Two layers. Inside the tool, the validator recomputes interference from coordinates and never looks at the conflict graph, so a bug in graph construction cannot hide a collision. Outside the tool, 57 pytest tests cover the edge cases the task implies.</a:t>
+              <a:t>Two layers. Inside the tool, the validator recomputes interference from coordinates and never looks at the conflict graph, so a bug in graph construction cannot hide a collision. Outside the tool, 98 pytest tests cover the edge cases the task implies, and check the hand-written colouring against networkx.</a:t>
             </a:r>
             <a:endParaRPr lang="en-US" dirty="0"/>
           </a:p>
@@ -10786,7 +10786,7 @@
                   <a:schemeClr val="accent3"/>
                 </a:solidFill>
               </a:rPr>
-              <a:t>Each colour is a slot. Run DSATUR and largest_first, keep the shorter.</a:t>
+              <a:t>Each colour is a slot. Hand-written DSATUR and largest_first.</a:t>
             </a:r>
             <a:endParaRPr lang="en-US" sz="1200" dirty="0"/>
           </a:p>
@@ -16389,7 +16389,7 @@
                   <a:schemeClr val="tx1"/>
                 </a:solidFill>
               </a:rPr>
-              <a:t>57 automated tests</a:t>
+              <a:t>98 automated tests</a:t>
             </a:r>
             <a:endParaRPr lang="en-US" sz="1600" dirty="0"/>
           </a:p>
@@ -16538,6 +16538,24 @@
                 </a:solidFill>
               </a:rPr>
               <a:t>Validator catches direct and hidden-terminal collisions</a:t>
+            </a:r>
+            <a:endParaRPr lang="en-US" sz="1200" dirty="0"/>
+          </a:p>
+          <a:p>
+            <a:pPr marL="342900" indent="-342900">
+              <a:spcAft>
+                <a:spcPts val="600"/>
+              </a:spcAft>
+              <a:buSzPct val="100000"/>
+              <a:buChar char="•"/>
+            </a:pPr>
+            <a:r>
+              <a:rPr lang="en-US" sz="1200" dirty="0">
+                <a:solidFill>
+                  <a:schemeClr val="accent3"/>
+                </a:solidFill>
+              </a:rPr>
+              <a:t>Hand-written DSATUR matches networkx exactly</a:t>
             </a:r>
             <a:endParaRPr lang="en-US" sz="1200" dirty="0"/>
           </a:p>

--- a/presentation.pptx
+++ b/presentation.pptx
@@ -119,13 +119,13 @@
   <p:extLst>
     <p:ext uri="{521415D9-36F7-43E2-AB2F-B90AF26B5E84}">
       <p14:sectionLst xmlns:p14="http://schemas.microsoft.com/office/powerpoint/2010/main">
-        <p14:section name="Introduction" id="{b358647a-90cf-b7d3-fb61-b1b5da8c0118}">
+        <p14:section name="Introduction" id="{d299f75c-c817-b4b8-1648-415f480204e8}">
           <p14:sldIdLst>
             <p14:sldId id="256"/>
             <p14:sldId id="257"/>
           </p14:sldIdLst>
         </p14:section>
-        <p14:section name="Part 1" id="{df0ac25a-3a49-edc2-abdf-fac24a05af23}">
+        <p14:section name="Part 1" id="{d9c296a7-dcce-fc4e-fd3a-890de80131ab}">
           <p14:sldIdLst>
             <p14:sldId id="258"/>
             <p14:sldId id="259"/>
@@ -134,7 +134,7 @@
             <p14:sldId id="262"/>
           </p14:sldIdLst>
         </p14:section>
-        <p14:section name="Part 2" id="{6d403b89-67b1-078a-5bd4-0ad0b0b008d4}">
+        <p14:section name="Part 2" id="{a96454e6-aacf-d447-74b5-5b0870a13d08}">
           <p14:sldIdLst>
             <p14:sldId id="263"/>
             <p14:sldId id="264"/>
@@ -142,7 +142,7 @@
             <p14:sldId id="266"/>
           </p14:sldIdLst>
         </p14:section>
-        <p14:section name="Wrap-up" id="{ce2b6c4a-5dcd-a9d1-3602-21580af9cf22}">
+        <p14:section name="Wrap-up" id="{c6eb2217-6de2-2b00-20ab-9ae9f13d0a4a}">
           <p14:sldIdLst>
             <p14:sldId id="267"/>
             <p14:sldId id="268"/>
